--- a/Lesson_3-4/Modelamiento_Sistemas.pptx
+++ b/Lesson_3-4/Modelamiento_Sistemas.pptx
@@ -197,13 +197,37 @@
 <file path=ppt/revisionInfo.xml><?xml version="1.0" encoding="utf-8"?>
 <p1510:revInfo xmlns:a="http://schemas.openxmlformats.org/drawingml/2006/main" xmlns:r="http://schemas.openxmlformats.org/officeDocument/2006/relationships" xmlns:p1510="http://schemas.microsoft.com/office/powerpoint/2015/10/main">
   <p1510:revLst>
-    <p1510:client id="{697342B5-C775-4770-B0AF-DEB4D22EC967}" v="345" dt="2025-08-28T21:27:36.447"/>
+    <p1510:client id="{E0CAB3E6-84E9-3B4E-9A96-3708A8A6020A}" v="1" dt="2025-09-06T18:02:23.499"/>
   </p1510:revLst>
 </p1510:revInfo>
 </file>
 
 <file path=ppt/changesInfos/changesInfo1.xml><?xml version="1.0" encoding="utf-8"?>
 <pc:chgInfo xmlns:a="http://schemas.openxmlformats.org/drawingml/2006/main" xmlns:r="http://schemas.openxmlformats.org/officeDocument/2006/relationships" xmlns:ac="http://schemas.microsoft.com/office/drawing/2013/main/command" xmlns:pc="http://schemas.microsoft.com/office/powerpoint/2013/main/command">
+  <pc:docChgLst>
+    <pc:chgData name="JHEYSON FABIAN VILLAVISAN BUITRAGO" userId="e5ced5c2-d787-455d-b115-4f08a699b8c8" providerId="ADAL" clId="{D29F3602-5A42-550B-85C2-F2C884FDDEDE}"/>
+    <pc:docChg chg="modSld">
+      <pc:chgData name="JHEYSON FABIAN VILLAVISAN BUITRAGO" userId="e5ced5c2-d787-455d-b115-4f08a699b8c8" providerId="ADAL" clId="{D29F3602-5A42-550B-85C2-F2C884FDDEDE}" dt="2025-09-06T18:02:23.493" v="0" actId="1076"/>
+      <pc:docMkLst>
+        <pc:docMk/>
+      </pc:docMkLst>
+      <pc:sldChg chg="modSp">
+        <pc:chgData name="JHEYSON FABIAN VILLAVISAN BUITRAGO" userId="e5ced5c2-d787-455d-b115-4f08a699b8c8" providerId="ADAL" clId="{D29F3602-5A42-550B-85C2-F2C884FDDEDE}" dt="2025-09-06T18:02:23.493" v="0" actId="1076"/>
+        <pc:sldMkLst>
+          <pc:docMk/>
+          <pc:sldMk cId="658582679" sldId="303"/>
+        </pc:sldMkLst>
+        <pc:picChg chg="mod">
+          <ac:chgData name="JHEYSON FABIAN VILLAVISAN BUITRAGO" userId="e5ced5c2-d787-455d-b115-4f08a699b8c8" providerId="ADAL" clId="{D29F3602-5A42-550B-85C2-F2C884FDDEDE}" dt="2025-09-06T18:02:23.493" v="0" actId="1076"/>
+          <ac:picMkLst>
+            <pc:docMk/>
+            <pc:sldMk cId="658582679" sldId="303"/>
+            <ac:picMk id="3076" creationId="{2109C652-ACA9-A567-1C0C-B48D21C78981}"/>
+          </ac:picMkLst>
+        </pc:picChg>
+      </pc:sldChg>
+    </pc:docChg>
+  </pc:docChgLst>
   <pc:docChgLst>
     <pc:chgData name="JHEYSON FABIAN VILLAVISAN BUITRAGO" userId="e5ced5c2-d787-455d-b115-4f08a699b8c8" providerId="ADAL" clId="{E3C0E130-1BF7-4D65-875C-E2ABBEC935D8}"/>
     <pc:docChg chg="modSld">
@@ -451,22 +475,6 @@
             <ac:spMk id="3" creationId="{86914BEC-450A-0709-4F10-5671B1AD3D9F}"/>
           </ac:spMkLst>
         </pc:spChg>
-        <pc:spChg chg="add">
-          <ac:chgData name="JHEYSON FABIAN VILLAVISAN BUITRAGO" userId="e5ced5c2-d787-455d-b115-4f08a699b8c8" providerId="ADAL" clId="{697342B5-C775-4770-B0AF-DEB4D22EC967}" dt="2025-08-28T20:15:46.600" v="571"/>
-          <ac:spMkLst>
-            <pc:docMk/>
-            <pc:sldMk cId="2541286" sldId="282"/>
-            <ac:spMk id="4" creationId="{E64CB486-B88D-25F9-8F1A-3A788B2FCA4F}"/>
-          </ac:spMkLst>
-        </pc:spChg>
-        <pc:spChg chg="add">
-          <ac:chgData name="JHEYSON FABIAN VILLAVISAN BUITRAGO" userId="e5ced5c2-d787-455d-b115-4f08a699b8c8" providerId="ADAL" clId="{697342B5-C775-4770-B0AF-DEB4D22EC967}" dt="2025-08-28T20:15:57.531" v="574"/>
-          <ac:spMkLst>
-            <pc:docMk/>
-            <pc:sldMk cId="2541286" sldId="282"/>
-            <ac:spMk id="6" creationId="{39B00103-B4F5-6598-9928-76CC6C6AC91A}"/>
-          </ac:spMkLst>
-        </pc:spChg>
         <pc:spChg chg="mod">
           <ac:chgData name="JHEYSON FABIAN VILLAVISAN BUITRAGO" userId="e5ced5c2-d787-455d-b115-4f08a699b8c8" providerId="ADAL" clId="{697342B5-C775-4770-B0AF-DEB4D22EC967}" dt="2025-08-28T20:15:11.560" v="519" actId="20577"/>
           <ac:spMkLst>
@@ -495,14 +503,6 @@
             <pc:docMk/>
             <pc:sldMk cId="1249203809" sldId="283"/>
             <ac:spMk id="3" creationId="{1AE8AF89-F11B-BDD1-87AD-6D6C2D317E93}"/>
-          </ac:spMkLst>
-        </pc:spChg>
-        <pc:spChg chg="add">
-          <ac:chgData name="JHEYSON FABIAN VILLAVISAN BUITRAGO" userId="e5ced5c2-d787-455d-b115-4f08a699b8c8" providerId="ADAL" clId="{697342B5-C775-4770-B0AF-DEB4D22EC967}" dt="2025-08-28T20:20:36.306" v="609"/>
-          <ac:spMkLst>
-            <pc:docMk/>
-            <pc:sldMk cId="1249203809" sldId="283"/>
-            <ac:spMk id="4" creationId="{9876EF3C-CA6B-29BB-9460-5EC7B8FBA5B2}"/>
           </ac:spMkLst>
         </pc:spChg>
         <pc:spChg chg="mod">
@@ -596,14 +596,6 @@
             <ac:spMk id="3" creationId="{276BA687-99EA-EBA4-6DF2-4A318D2301A9}"/>
           </ac:spMkLst>
         </pc:spChg>
-        <pc:spChg chg="add del">
-          <ac:chgData name="JHEYSON FABIAN VILLAVISAN BUITRAGO" userId="e5ced5c2-d787-455d-b115-4f08a699b8c8" providerId="ADAL" clId="{697342B5-C775-4770-B0AF-DEB4D22EC967}" dt="2025-08-28T20:27:45.867" v="757" actId="22"/>
-          <ac:spMkLst>
-            <pc:docMk/>
-            <pc:sldMk cId="2664902677" sldId="286"/>
-            <ac:spMk id="6" creationId="{43B916FE-2F93-4A8E-8B8C-254487DDC8DB}"/>
-          </ac:spMkLst>
-        </pc:spChg>
         <pc:spChg chg="mod">
           <ac:chgData name="JHEYSON FABIAN VILLAVISAN BUITRAGO" userId="e5ced5c2-d787-455d-b115-4f08a699b8c8" providerId="ADAL" clId="{697342B5-C775-4770-B0AF-DEB4D22EC967}" dt="2025-08-28T20:33:54.467" v="764" actId="20577"/>
           <ac:spMkLst>
@@ -634,28 +626,12 @@
           <pc:docMk/>
           <pc:sldMk cId="1073089991" sldId="287"/>
         </pc:sldMkLst>
-        <pc:spChg chg="add del mod">
-          <ac:chgData name="JHEYSON FABIAN VILLAVISAN BUITRAGO" userId="e5ced5c2-d787-455d-b115-4f08a699b8c8" providerId="ADAL" clId="{697342B5-C775-4770-B0AF-DEB4D22EC967}" dt="2025-08-28T20:36:31.247" v="785"/>
-          <ac:spMkLst>
-            <pc:docMk/>
-            <pc:sldMk cId="1073089991" sldId="287"/>
-            <ac:spMk id="4" creationId="{D1984C07-74F9-8464-7B40-9B8139D93742}"/>
-          </ac:spMkLst>
-        </pc:spChg>
         <pc:spChg chg="add mod">
           <ac:chgData name="JHEYSON FABIAN VILLAVISAN BUITRAGO" userId="e5ced5c2-d787-455d-b115-4f08a699b8c8" providerId="ADAL" clId="{697342B5-C775-4770-B0AF-DEB4D22EC967}" dt="2025-08-28T20:42:36.488" v="853" actId="1076"/>
           <ac:spMkLst>
             <pc:docMk/>
             <pc:sldMk cId="1073089991" sldId="287"/>
             <ac:spMk id="8" creationId="{6CA91BCA-7FD5-F7F5-5AB7-0239DDFE5123}"/>
-          </ac:spMkLst>
-        </pc:spChg>
-        <pc:spChg chg="add del mod">
-          <ac:chgData name="JHEYSON FABIAN VILLAVISAN BUITRAGO" userId="e5ced5c2-d787-455d-b115-4f08a699b8c8" providerId="ADAL" clId="{697342B5-C775-4770-B0AF-DEB4D22EC967}" dt="2025-08-28T20:38:48.908" v="813" actId="478"/>
-          <ac:spMkLst>
-            <pc:docMk/>
-            <pc:sldMk cId="1073089991" sldId="287"/>
-            <ac:spMk id="9" creationId="{95A05670-3803-8B36-179C-D2DCAED2CADE}"/>
           </ac:spMkLst>
         </pc:spChg>
         <pc:spChg chg="mod">
@@ -694,22 +670,6 @@
             <pc:docMk/>
             <pc:sldMk cId="3711119762" sldId="288"/>
             <ac:spMk id="6" creationId="{1F092DC1-A4BD-EFB1-17B8-2A9CE74053A9}"/>
-          </ac:spMkLst>
-        </pc:spChg>
-        <pc:spChg chg="del mod">
-          <ac:chgData name="JHEYSON FABIAN VILLAVISAN BUITRAGO" userId="e5ced5c2-d787-455d-b115-4f08a699b8c8" providerId="ADAL" clId="{697342B5-C775-4770-B0AF-DEB4D22EC967}" dt="2025-08-28T20:39:17.674" v="822" actId="478"/>
-          <ac:spMkLst>
-            <pc:docMk/>
-            <pc:sldMk cId="3711119762" sldId="288"/>
-            <ac:spMk id="8" creationId="{9EE37487-2631-EF8F-1C5B-4AFDA7A892EF}"/>
-          </ac:spMkLst>
-        </pc:spChg>
-        <pc:spChg chg="del">
-          <ac:chgData name="JHEYSON FABIAN VILLAVISAN BUITRAGO" userId="e5ced5c2-d787-455d-b115-4f08a699b8c8" providerId="ADAL" clId="{697342B5-C775-4770-B0AF-DEB4D22EC967}" dt="2025-08-28T20:38:46.970" v="812" actId="478"/>
-          <ac:spMkLst>
-            <pc:docMk/>
-            <pc:sldMk cId="3711119762" sldId="288"/>
-            <ac:spMk id="9" creationId="{F778887E-C996-5804-E6B4-7834BB84E558}"/>
           </ac:spMkLst>
         </pc:spChg>
         <pc:spChg chg="mod">
@@ -860,14 +820,6 @@
           <pc:docMk/>
           <pc:sldMk cId="24185597" sldId="300"/>
         </pc:sldMkLst>
-        <pc:spChg chg="mod">
-          <ac:chgData name="JHEYSON FABIAN VILLAVISAN BUITRAGO" userId="e5ced5c2-d787-455d-b115-4f08a699b8c8" providerId="ADAL" clId="{697342B5-C775-4770-B0AF-DEB4D22EC967}" dt="2025-08-28T20:53:44.053" v="981" actId="20577"/>
-          <ac:spMkLst>
-            <pc:docMk/>
-            <pc:sldMk cId="24185597" sldId="300"/>
-            <ac:spMk id="10" creationId="{81863EB9-70AC-94AC-9357-8D202F2E6281}"/>
-          </ac:spMkLst>
-        </pc:spChg>
       </pc:sldChg>
       <pc:sldChg chg="modSp add mod ord">
         <pc:chgData name="JHEYSON FABIAN VILLAVISAN BUITRAGO" userId="e5ced5c2-d787-455d-b115-4f08a699b8c8" providerId="ADAL" clId="{697342B5-C775-4770-B0AF-DEB4D22EC967}" dt="2025-08-28T20:57:01.603" v="1027" actId="1076"/>
@@ -937,14 +889,6 @@
             <ac:spMk id="4" creationId="{28C1BCD1-3C4B-88DA-BD47-DB41809448CC}"/>
           </ac:spMkLst>
         </pc:spChg>
-        <pc:spChg chg="del mod">
-          <ac:chgData name="JHEYSON FABIAN VILLAVISAN BUITRAGO" userId="e5ced5c2-d787-455d-b115-4f08a699b8c8" providerId="ADAL" clId="{697342B5-C775-4770-B0AF-DEB4D22EC967}" dt="2025-08-28T21:05:53.678" v="1088" actId="478"/>
-          <ac:spMkLst>
-            <pc:docMk/>
-            <pc:sldMk cId="1588383939" sldId="302"/>
-            <ac:spMk id="6" creationId="{774A710A-E677-089E-5F72-EF5F710AC7B8}"/>
-          </ac:spMkLst>
-        </pc:spChg>
         <pc:spChg chg="add mod">
           <ac:chgData name="JHEYSON FABIAN VILLAVISAN BUITRAGO" userId="e5ced5c2-d787-455d-b115-4f08a699b8c8" providerId="ADAL" clId="{697342B5-C775-4770-B0AF-DEB4D22EC967}" dt="2025-08-28T21:07:49.498" v="1247" actId="113"/>
           <ac:spMkLst>
@@ -976,22 +920,6 @@
             <ac:spMk id="2" creationId="{B94E6F50-D2E7-A871-B3DC-2D5194654E04}"/>
           </ac:spMkLst>
         </pc:spChg>
-        <pc:spChg chg="del">
-          <ac:chgData name="JHEYSON FABIAN VILLAVISAN BUITRAGO" userId="e5ced5c2-d787-455d-b115-4f08a699b8c8" providerId="ADAL" clId="{697342B5-C775-4770-B0AF-DEB4D22EC967}" dt="2025-08-28T21:15:04.811" v="1279" actId="478"/>
-          <ac:spMkLst>
-            <pc:docMk/>
-            <pc:sldMk cId="658582679" sldId="303"/>
-            <ac:spMk id="4" creationId="{F52AFF45-6B44-F279-71D8-A2B100ADFD8C}"/>
-          </ac:spMkLst>
-        </pc:spChg>
-        <pc:spChg chg="del">
-          <ac:chgData name="JHEYSON FABIAN VILLAVISAN BUITRAGO" userId="e5ced5c2-d787-455d-b115-4f08a699b8c8" providerId="ADAL" clId="{697342B5-C775-4770-B0AF-DEB4D22EC967}" dt="2025-08-28T21:15:06.112" v="1280" actId="478"/>
-          <ac:spMkLst>
-            <pc:docMk/>
-            <pc:sldMk cId="658582679" sldId="303"/>
-            <ac:spMk id="8" creationId="{9AAECEF5-9D28-837C-E81E-E041C60677E3}"/>
-          </ac:spMkLst>
-        </pc:spChg>
         <pc:spChg chg="mod">
           <ac:chgData name="JHEYSON FABIAN VILLAVISAN BUITRAGO" userId="e5ced5c2-d787-455d-b115-4f08a699b8c8" providerId="ADAL" clId="{697342B5-C775-4770-B0AF-DEB4D22EC967}" dt="2025-08-28T21:25:54.972" v="1459" actId="20577"/>
           <ac:spMkLst>
@@ -1000,14 +928,6 @@
             <ac:spMk id="10" creationId="{4C20299A-9B23-B98D-4204-84CEB692880A}"/>
           </ac:spMkLst>
         </pc:spChg>
-        <pc:picChg chg="del">
-          <ac:chgData name="JHEYSON FABIAN VILLAVISAN BUITRAGO" userId="e5ced5c2-d787-455d-b115-4f08a699b8c8" providerId="ADAL" clId="{697342B5-C775-4770-B0AF-DEB4D22EC967}" dt="2025-08-28T21:15:03.342" v="1278" actId="478"/>
-          <ac:picMkLst>
-            <pc:docMk/>
-            <pc:sldMk cId="658582679" sldId="303"/>
-            <ac:picMk id="7" creationId="{EE03B4DA-A22D-0251-3BA5-8CDB1D4CE836}"/>
-          </ac:picMkLst>
-        </pc:picChg>
         <pc:picChg chg="add mod">
           <ac:chgData name="JHEYSON FABIAN VILLAVISAN BUITRAGO" userId="e5ced5c2-d787-455d-b115-4f08a699b8c8" providerId="ADAL" clId="{697342B5-C775-4770-B0AF-DEB4D22EC967}" dt="2025-08-28T21:27:34.936" v="1476" actId="1076"/>
           <ac:picMkLst>
@@ -2184,7 +2104,7 @@
               <a:pPr>
                 <a:defRPr/>
               </a:pPr>
-              <a:t>28/08/2025</a:t>
+              <a:t>6/09/25</a:t>
             </a:fld>
             <a:endParaRPr lang="es-CO"/>
           </a:p>
@@ -2427,7 +2347,7 @@
               <a:pPr>
                 <a:defRPr/>
               </a:pPr>
-              <a:t>28/08/2025</a:t>
+              <a:t>6/09/25</a:t>
             </a:fld>
             <a:endParaRPr lang="es-CO"/>
           </a:p>
@@ -3983,7 +3903,7 @@
           <a:p>
             <a:fld id="{9CF7635E-2D71-42E7-9E6C-FBB85A15A85F}" type="datetimeFigureOut">
               <a:rPr lang="es-CO" smtClean="0"/>
-              <a:t>28/08/2025</a:t>
+              <a:t>6/09/25</a:t>
             </a:fld>
             <a:endParaRPr lang="es-CO"/>
           </a:p>
@@ -4249,7 +4169,7 @@
           <a:p>
             <a:fld id="{9CF7635E-2D71-42E7-9E6C-FBB85A15A85F}" type="datetimeFigureOut">
               <a:rPr lang="es-CO" smtClean="0"/>
-              <a:t>28/08/2025</a:t>
+              <a:t>6/09/25</a:t>
             </a:fld>
             <a:endParaRPr lang="es-CO"/>
           </a:p>
@@ -4465,7 +4385,7 @@
           <a:p>
             <a:fld id="{9CF7635E-2D71-42E7-9E6C-FBB85A15A85F}" type="datetimeFigureOut">
               <a:rPr lang="es-CO" smtClean="0"/>
-              <a:t>28/08/2025</a:t>
+              <a:t>6/09/25</a:t>
             </a:fld>
             <a:endParaRPr lang="es-CO"/>
           </a:p>
@@ -6094,7 +6014,7 @@
           <a:p>
             <a:fld id="{9CF7635E-2D71-42E7-9E6C-FBB85A15A85F}" type="datetimeFigureOut">
               <a:rPr lang="es-CO" smtClean="0"/>
-              <a:t>28/08/2025</a:t>
+              <a:t>6/09/25</a:t>
             </a:fld>
             <a:endParaRPr lang="es-CO"/>
           </a:p>
@@ -6541,7 +6461,7 @@
           <a:p>
             <a:fld id="{9CF7635E-2D71-42E7-9E6C-FBB85A15A85F}" type="datetimeFigureOut">
               <a:rPr lang="es-CO" smtClean="0"/>
-              <a:t>28/08/2025</a:t>
+              <a:t>6/09/25</a:t>
             </a:fld>
             <a:endParaRPr lang="es-CO"/>
           </a:p>
@@ -6815,7 +6735,7 @@
           <a:p>
             <a:fld id="{9CF7635E-2D71-42E7-9E6C-FBB85A15A85F}" type="datetimeFigureOut">
               <a:rPr lang="es-CO" smtClean="0"/>
-              <a:t>28/08/2025</a:t>
+              <a:t>6/09/25</a:t>
             </a:fld>
             <a:endParaRPr lang="es-CO"/>
           </a:p>
@@ -7236,7 +7156,7 @@
           <a:p>
             <a:fld id="{9CF7635E-2D71-42E7-9E6C-FBB85A15A85F}" type="datetimeFigureOut">
               <a:rPr lang="es-CO" smtClean="0"/>
-              <a:t>28/08/2025</a:t>
+              <a:t>6/09/25</a:t>
             </a:fld>
             <a:endParaRPr lang="es-CO"/>
           </a:p>
@@ -7384,7 +7304,7 @@
           <a:p>
             <a:fld id="{9CF7635E-2D71-42E7-9E6C-FBB85A15A85F}" type="datetimeFigureOut">
               <a:rPr lang="es-CO" smtClean="0"/>
-              <a:t>28/08/2025</a:t>
+              <a:t>6/09/25</a:t>
             </a:fld>
             <a:endParaRPr lang="es-CO"/>
           </a:p>
@@ -7503,7 +7423,7 @@
           <a:p>
             <a:fld id="{9CF7635E-2D71-42E7-9E6C-FBB85A15A85F}" type="datetimeFigureOut">
               <a:rPr lang="es-CO" smtClean="0"/>
-              <a:t>28/08/2025</a:t>
+              <a:t>6/09/25</a:t>
             </a:fld>
             <a:endParaRPr lang="es-CO"/>
           </a:p>
@@ -7822,7 +7742,7 @@
           <a:p>
             <a:fld id="{9CF7635E-2D71-42E7-9E6C-FBB85A15A85F}" type="datetimeFigureOut">
               <a:rPr lang="es-CO" smtClean="0"/>
-              <a:t>28/08/2025</a:t>
+              <a:t>6/09/25</a:t>
             </a:fld>
             <a:endParaRPr lang="es-CO"/>
           </a:p>
@@ -8117,7 +8037,7 @@
           <a:p>
             <a:fld id="{9CF7635E-2D71-42E7-9E6C-FBB85A15A85F}" type="datetimeFigureOut">
               <a:rPr lang="es-CO" smtClean="0"/>
-              <a:t>28/08/2025</a:t>
+              <a:t>6/09/25</a:t>
             </a:fld>
             <a:endParaRPr lang="es-CO"/>
           </a:p>
@@ -8366,7 +8286,7 @@
           <a:p>
             <a:fld id="{9CF7635E-2D71-42E7-9E6C-FBB85A15A85F}" type="datetimeFigureOut">
               <a:rPr lang="es-CO" smtClean="0"/>
-              <a:t>28/08/2025</a:t>
+              <a:t>6/09/25</a:t>
             </a:fld>
             <a:endParaRPr lang="es-CO"/>
           </a:p>
@@ -12573,8 +12493,8 @@
           </a:prstGeom>
         </p:spPr>
       </p:pic>
-      <mc:AlternateContent xmlns:mc="http://schemas.openxmlformats.org/markup-compatibility/2006">
-        <mc:Choice xmlns:a14="http://schemas.microsoft.com/office/drawing/2010/main" Requires="a14">
+      <mc:AlternateContent xmlns:mc="http://schemas.openxmlformats.org/markup-compatibility/2006" xmlns:a14="http://schemas.microsoft.com/office/drawing/2010/main">
+        <mc:Choice Requires="a14">
           <p:sp>
             <p:nvSpPr>
               <p:cNvPr id="8" name="CuadroTexto 7">
@@ -12680,7 +12600,7 @@
             </p:txBody>
           </p:sp>
         </mc:Choice>
-        <mc:Fallback>
+        <mc:Fallback xmlns="">
           <p:sp>
             <p:nvSpPr>
               <p:cNvPr id="8" name="CuadroTexto 7">
@@ -13380,8 +13300,8 @@
           </a:prstGeom>
         </p:spPr>
       </p:pic>
-      <mc:AlternateContent xmlns:mc="http://schemas.openxmlformats.org/markup-compatibility/2006">
-        <mc:Choice xmlns:a14="http://schemas.microsoft.com/office/drawing/2010/main" Requires="a14">
+      <mc:AlternateContent xmlns:mc="http://schemas.openxmlformats.org/markup-compatibility/2006" xmlns:a14="http://schemas.microsoft.com/office/drawing/2010/main">
+        <mc:Choice Requires="a14">
           <p:sp>
             <p:nvSpPr>
               <p:cNvPr id="4" name="CuadroTexto 3">
@@ -13410,6 +13330,7 @@
               </a:bodyPr>
               <a:lstStyle/>
               <a:p>
+                <a:pPr/>
                 <a14:m>
                   <m:oMathPara xmlns:m="http://schemas.openxmlformats.org/officeDocument/2006/math">
                     <m:oMathParaPr>
@@ -13548,7 +13469,7 @@
             </p:txBody>
           </p:sp>
         </mc:Choice>
-        <mc:Fallback>
+        <mc:Fallback xmlns="">
           <p:sp>
             <p:nvSpPr>
               <p:cNvPr id="4" name="CuadroTexto 3">
@@ -13593,8 +13514,8 @@
           </p:sp>
         </mc:Fallback>
       </mc:AlternateContent>
-      <mc:AlternateContent xmlns:mc="http://schemas.openxmlformats.org/markup-compatibility/2006">
-        <mc:Choice xmlns:a14="http://schemas.microsoft.com/office/drawing/2010/main" Requires="a14">
+      <mc:AlternateContent xmlns:mc="http://schemas.openxmlformats.org/markup-compatibility/2006" xmlns:a14="http://schemas.microsoft.com/office/drawing/2010/main">
+        <mc:Choice Requires="a14">
           <p:sp>
             <p:nvSpPr>
               <p:cNvPr id="6" name="CuadroTexto 5">
@@ -13623,6 +13544,7 @@
               </a:bodyPr>
               <a:lstStyle/>
               <a:p>
+                <a:pPr/>
                 <a14:m>
                   <m:oMathPara xmlns:m="http://schemas.openxmlformats.org/officeDocument/2006/math">
                     <m:oMathParaPr>
@@ -13693,7 +13615,7 @@
             </p:txBody>
           </p:sp>
         </mc:Choice>
-        <mc:Fallback>
+        <mc:Fallback xmlns="">
           <p:sp>
             <p:nvSpPr>
               <p:cNvPr id="6" name="CuadroTexto 5">
@@ -14393,8 +14315,8 @@
           </a:prstGeom>
         </p:spPr>
       </p:pic>
-      <mc:AlternateContent xmlns:mc="http://schemas.openxmlformats.org/markup-compatibility/2006">
-        <mc:Choice xmlns:a14="http://schemas.microsoft.com/office/drawing/2010/main" Requires="a14">
+      <mc:AlternateContent xmlns:mc="http://schemas.openxmlformats.org/markup-compatibility/2006" xmlns:a14="http://schemas.microsoft.com/office/drawing/2010/main">
+        <mc:Choice Requires="a14">
           <p:sp>
             <p:nvSpPr>
               <p:cNvPr id="4" name="CuadroTexto 3">
@@ -14623,7 +14545,7 @@
             </p:txBody>
           </p:sp>
         </mc:Choice>
-        <mc:Fallback>
+        <mc:Fallback xmlns="">
           <p:sp>
             <p:nvSpPr>
               <p:cNvPr id="4" name="CuadroTexto 3">
@@ -14668,8 +14590,8 @@
           </p:sp>
         </mc:Fallback>
       </mc:AlternateContent>
-      <mc:AlternateContent xmlns:mc="http://schemas.openxmlformats.org/markup-compatibility/2006">
-        <mc:Choice xmlns:a14="http://schemas.microsoft.com/office/drawing/2010/main" Requires="a14">
+      <mc:AlternateContent xmlns:mc="http://schemas.openxmlformats.org/markup-compatibility/2006" xmlns:a14="http://schemas.microsoft.com/office/drawing/2010/main">
+        <mc:Choice Requires="a14">
           <p:sp>
             <p:nvSpPr>
               <p:cNvPr id="6" name="CuadroTexto 5">
@@ -14814,7 +14736,7 @@
             </p:txBody>
           </p:sp>
         </mc:Choice>
-        <mc:Fallback>
+        <mc:Fallback xmlns="">
           <p:sp>
             <p:nvSpPr>
               <p:cNvPr id="6" name="CuadroTexto 5">
@@ -17485,8 +17407,8 @@
           </a:prstGeom>
         </p:spPr>
       </p:pic>
-      <mc:AlternateContent xmlns:mc="http://schemas.openxmlformats.org/markup-compatibility/2006">
-        <mc:Choice xmlns:a14="http://schemas.microsoft.com/office/drawing/2010/main" Requires="a14">
+      <mc:AlternateContent xmlns:mc="http://schemas.openxmlformats.org/markup-compatibility/2006" xmlns:a14="http://schemas.microsoft.com/office/drawing/2010/main">
+        <mc:Choice Requires="a14">
           <p:sp>
             <p:nvSpPr>
               <p:cNvPr id="4" name="CuadroTexto 3">
@@ -17634,7 +17556,7 @@
             </p:txBody>
           </p:sp>
         </mc:Choice>
-        <mc:Fallback>
+        <mc:Fallback xmlns="">
           <p:sp>
             <p:nvSpPr>
               <p:cNvPr id="4" name="CuadroTexto 3">
@@ -17679,8 +17601,8 @@
           </p:sp>
         </mc:Fallback>
       </mc:AlternateContent>
-      <mc:AlternateContent xmlns:mc="http://schemas.openxmlformats.org/markup-compatibility/2006">
-        <mc:Choice xmlns:a14="http://schemas.microsoft.com/office/drawing/2010/main" Requires="a14">
+      <mc:AlternateContent xmlns:mc="http://schemas.openxmlformats.org/markup-compatibility/2006" xmlns:a14="http://schemas.microsoft.com/office/drawing/2010/main">
+        <mc:Choice Requires="a14">
           <p:sp>
             <p:nvSpPr>
               <p:cNvPr id="6" name="CuadroTexto 5">
@@ -17798,7 +17720,7 @@
             </p:txBody>
           </p:sp>
         </mc:Choice>
-        <mc:Fallback>
+        <mc:Fallback xmlns="">
           <p:sp>
             <p:nvSpPr>
               <p:cNvPr id="6" name="CuadroTexto 5">
@@ -19035,8 +18957,8 @@
           </a:prstGeom>
         </p:spPr>
       </p:pic>
-      <mc:AlternateContent xmlns:mc="http://schemas.openxmlformats.org/markup-compatibility/2006">
-        <mc:Choice xmlns:a14="http://schemas.microsoft.com/office/drawing/2010/main" Requires="a14">
+      <mc:AlternateContent xmlns:mc="http://schemas.openxmlformats.org/markup-compatibility/2006" xmlns:a14="http://schemas.microsoft.com/office/drawing/2010/main">
+        <mc:Choice Requires="a14">
           <p:sp>
             <p:nvSpPr>
               <p:cNvPr id="4" name="CuadroTexto 3">
@@ -19178,7 +19100,7 @@
             </p:txBody>
           </p:sp>
         </mc:Choice>
-        <mc:Fallback>
+        <mc:Fallback xmlns="">
           <p:sp>
             <p:nvSpPr>
               <p:cNvPr id="4" name="CuadroTexto 3">
@@ -19223,8 +19145,8 @@
           </p:sp>
         </mc:Fallback>
       </mc:AlternateContent>
-      <mc:AlternateContent xmlns:mc="http://schemas.openxmlformats.org/markup-compatibility/2006">
-        <mc:Choice xmlns:a14="http://schemas.microsoft.com/office/drawing/2010/main" Requires="a14">
+      <mc:AlternateContent xmlns:mc="http://schemas.openxmlformats.org/markup-compatibility/2006" xmlns:a14="http://schemas.microsoft.com/office/drawing/2010/main">
+        <mc:Choice Requires="a14">
           <p:sp>
             <p:nvSpPr>
               <p:cNvPr id="6" name="CuadroTexto 5">
@@ -19342,7 +19264,7 @@
             </p:txBody>
           </p:sp>
         </mc:Choice>
-        <mc:Fallback>
+        <mc:Fallback xmlns="">
           <p:sp>
             <p:nvSpPr>
               <p:cNvPr id="6" name="CuadroTexto 5">
@@ -20042,8 +19964,8 @@
           </a:prstGeom>
         </p:spPr>
       </p:pic>
-      <mc:AlternateContent xmlns:mc="http://schemas.openxmlformats.org/markup-compatibility/2006">
-        <mc:Choice xmlns:a14="http://schemas.microsoft.com/office/drawing/2010/main" Requires="a14">
+      <mc:AlternateContent xmlns:mc="http://schemas.openxmlformats.org/markup-compatibility/2006" xmlns:a14="http://schemas.microsoft.com/office/drawing/2010/main">
+        <mc:Choice Requires="a14">
           <p:sp>
             <p:nvSpPr>
               <p:cNvPr id="4" name="CuadroTexto 3">
@@ -20072,7 +19994,6 @@
               </a:bodyPr>
               <a:lstStyle/>
               <a:p>
-                <a:pPr/>
                 <a14:m>
                   <m:oMath xmlns:m="http://schemas.openxmlformats.org/officeDocument/2006/math">
                     <m:r>
@@ -20268,7 +20189,7 @@
             </p:txBody>
           </p:sp>
         </mc:Choice>
-        <mc:Fallback>
+        <mc:Fallback xmlns="">
           <p:sp>
             <p:nvSpPr>
               <p:cNvPr id="4" name="CuadroTexto 3">
@@ -21145,7 +21066,7 @@
         </p:blipFill>
         <p:spPr bwMode="auto">
           <a:xfrm>
-            <a:off x="5001021" y="2150297"/>
+            <a:off x="5001021" y="1757836"/>
             <a:ext cx="2562225" cy="2486025"/>
           </a:xfrm>
           <a:prstGeom prst="rect">
@@ -26179,23 +26100,6 @@
 </file>
 
 <file path=customXml/item1.xml><?xml version="1.0" encoding="utf-8"?>
-<p:properties xmlns:p="http://schemas.microsoft.com/office/2006/metadata/properties" xmlns:xsi="http://www.w3.org/2001/XMLSchema-instance" xmlns:pc="http://schemas.microsoft.com/office/infopath/2007/PartnerControls">
-  <documentManagement>
-    <_activity xmlns="bdc56f61-abc0-4f7e-bfec-a93ccd1ae886" xsi:nil="true"/>
-  </documentManagement>
-</p:properties>
-</file>
-
-<file path=customXml/item2.xml><?xml version="1.0" encoding="utf-8"?>
-<?mso-contentType ?>
-<FormTemplates xmlns="http://schemas.microsoft.com/sharepoint/v3/contenttype/forms">
-  <Display>DocumentLibraryForm</Display>
-  <Edit>DocumentLibraryForm</Edit>
-  <New>DocumentLibraryForm</New>
-</FormTemplates>
-</file>
-
-<file path=customXml/item3.xml><?xml version="1.0" encoding="utf-8"?>
 <ct:contentTypeSchema xmlns:ct="http://schemas.microsoft.com/office/2006/metadata/contentType" xmlns:ma="http://schemas.microsoft.com/office/2006/metadata/properties/metaAttributes" ct:_="" ma:_="" ma:contentTypeName="Documento" ma:contentTypeID="0x0101007A62137D465CE64A8C883A4664514BF8" ma:contentTypeVersion="15" ma:contentTypeDescription="Crear nuevo documento." ma:contentTypeScope="" ma:versionID="a1bd1d59f691eb9bca6952b111268275">
   <xsd:schema xmlns:xsd="http://www.w3.org/2001/XMLSchema" xmlns:xs="http://www.w3.org/2001/XMLSchema" xmlns:p="http://schemas.microsoft.com/office/2006/metadata/properties" xmlns:ns3="669280c1-d17e-4d1d-bd7f-b4f14cc6bf1d" xmlns:ns4="bdc56f61-abc0-4f7e-bfec-a93ccd1ae886" targetNamespace="http://schemas.microsoft.com/office/2006/metadata/properties" ma:root="true" ma:fieldsID="d02990a02f19f0f9fc7b999b1809cae4" ns3:_="" ns4:_="">
     <xsd:import namespace="669280c1-d17e-4d1d-bd7f-b4f14cc6bf1d"/>
@@ -26430,32 +26334,24 @@
 </ct:contentTypeSchema>
 </file>
 
-<file path=customXml/itemProps1.xml><?xml version="1.0" encoding="utf-8"?>
-<ds:datastoreItem xmlns:ds="http://schemas.openxmlformats.org/officeDocument/2006/customXml" ds:itemID="{0825853C-1B27-4995-A583-4D39F900BB7F}">
-  <ds:schemaRefs>
-    <ds:schemaRef ds:uri="669280c1-d17e-4d1d-bd7f-b4f14cc6bf1d"/>
-    <ds:schemaRef ds:uri="bdc56f61-abc0-4f7e-bfec-a93ccd1ae886"/>
-    <ds:schemaRef ds:uri="http://purl.org/dc/dcmitype/"/>
-    <ds:schemaRef ds:uri="http://purl.org/dc/elements/1.1/"/>
-    <ds:schemaRef ds:uri="http://purl.org/dc/terms/"/>
-    <ds:schemaRef ds:uri="http://schemas.microsoft.com/office/2006/documentManagement/types"/>
-    <ds:schemaRef ds:uri="http://schemas.microsoft.com/office/2006/metadata/properties"/>
-    <ds:schemaRef ds:uri="http://schemas.microsoft.com/office/infopath/2007/PartnerControls"/>
-    <ds:schemaRef ds:uri="http://schemas.openxmlformats.org/package/2006/metadata/core-properties"/>
-    <ds:schemaRef ds:uri="http://www.w3.org/XML/1998/namespace"/>
-  </ds:schemaRefs>
-</ds:datastoreItem>
+<file path=customXml/item2.xml><?xml version="1.0" encoding="utf-8"?>
+<?mso-contentType ?>
+<FormTemplates xmlns="http://schemas.microsoft.com/sharepoint/v3/contenttype/forms">
+  <Display>DocumentLibraryForm</Display>
+  <Edit>DocumentLibraryForm</Edit>
+  <New>DocumentLibraryForm</New>
+</FormTemplates>
 </file>
 
-<file path=customXml/itemProps2.xml><?xml version="1.0" encoding="utf-8"?>
-<ds:datastoreItem xmlns:ds="http://schemas.openxmlformats.org/officeDocument/2006/customXml" ds:itemID="{4E8623C8-32E1-48B0-9F0A-13F2E9582B7E}">
-  <ds:schemaRefs>
-    <ds:schemaRef ds:uri="http://schemas.microsoft.com/sharepoint/v3/contenttype/forms"/>
-  </ds:schemaRefs>
-</ds:datastoreItem>
+<file path=customXml/item3.xml><?xml version="1.0" encoding="utf-8"?>
+<p:properties xmlns:p="http://schemas.microsoft.com/office/2006/metadata/properties" xmlns:xsi="http://www.w3.org/2001/XMLSchema-instance" xmlns:pc="http://schemas.microsoft.com/office/infopath/2007/PartnerControls">
+  <documentManagement>
+    <_activity xmlns="bdc56f61-abc0-4f7e-bfec-a93ccd1ae886" xsi:nil="true"/>
+  </documentManagement>
+</p:properties>
 </file>
 
-<file path=customXml/itemProps3.xml><?xml version="1.0" encoding="utf-8"?>
+<file path=customXml/itemProps1.xml><?xml version="1.0" encoding="utf-8"?>
 <ds:datastoreItem xmlns:ds="http://schemas.openxmlformats.org/officeDocument/2006/customXml" ds:itemID="{025820C3-FD82-4EFC-BF14-EAF1F9613F52}">
   <ds:schemaRefs>
     <ds:schemaRef ds:uri="669280c1-d17e-4d1d-bd7f-b4f14cc6bf1d"/>
@@ -26472,4 +26368,29 @@
     <ds:schemaRef ds:uri="http://www.w3.org/2001/XMLSchema"/>
   </ds:schemaRefs>
 </ds:datastoreItem>
+</file>
+
+<file path=customXml/itemProps2.xml><?xml version="1.0" encoding="utf-8"?>
+<ds:datastoreItem xmlns:ds="http://schemas.openxmlformats.org/officeDocument/2006/customXml" ds:itemID="{4E8623C8-32E1-48B0-9F0A-13F2E9582B7E}">
+  <ds:schemaRefs>
+    <ds:schemaRef ds:uri="http://schemas.microsoft.com/sharepoint/v3/contenttype/forms"/>
+  </ds:schemaRefs>
+</ds:datastoreItem>
+</file>
+
+<file path=customXml/itemProps3.xml><?xml version="1.0" encoding="utf-8"?>
+<ds:datastoreItem xmlns:ds="http://schemas.openxmlformats.org/officeDocument/2006/customXml" ds:itemID="{0825853C-1B27-4995-A583-4D39F900BB7F}">
+  <ds:schemaRefs>
+    <ds:schemaRef ds:uri="http://purl.org/dc/dcmitype/"/>
+    <ds:schemaRef ds:uri="http://purl.org/dc/elements/1.1/"/>
+    <ds:schemaRef ds:uri="http://purl.org/dc/terms/"/>
+    <ds:schemaRef ds:uri="http://schemas.openxmlformats.org/package/2006/metadata/core-properties"/>
+    <ds:schemaRef ds:uri="bdc56f61-abc0-4f7e-bfec-a93ccd1ae886"/>
+    <ds:schemaRef ds:uri="http://www.w3.org/XML/1998/namespace"/>
+    <ds:schemaRef ds:uri="http://schemas.microsoft.com/office/2006/documentManagement/types"/>
+    <ds:schemaRef ds:uri="http://schemas.microsoft.com/office/infopath/2007/PartnerControls"/>
+    <ds:schemaRef ds:uri="669280c1-d17e-4d1d-bd7f-b4f14cc6bf1d"/>
+    <ds:schemaRef ds:uri="http://schemas.microsoft.com/office/2006/metadata/properties"/>
+  </ds:schemaRefs>
+</ds:datastoreItem>
 </file>